--- a/GroundTruth/AddBibliography_GroundTruthA.pptx
+++ b/GroundTruth/AddBibliography_GroundTruthA.pptx
@@ -29715,15 +29715,15 @@
             </a:pPr>
             <a:r>
               <a:rPr lang="en-US" sz="1400" dirty="0"/>
-              <a:t>M. Ali and C. Mangione. Health Affairs, </a:t>
+              <a:t>Agarwal SD, Sommers BD. Insurance Coverage after Job Loss - The Importance of the ACA during the Covid-Associated Recession [published online ahead of print, 2020 Aug 19]. </a:t>
             </a:r>
             <a:r>
               <a:rPr lang="en-US" sz="1400" i="1" dirty="0"/>
-              <a:t>In Press, </a:t>
+              <a:t>N Engl J Med</a:t>
             </a:r>
             <a:r>
               <a:rPr lang="en-US" sz="1400" dirty="0"/>
-              <a:t>2020</a:t>
+              <a:t>. 2020;10.1056/NEJMp2023312. doi:10.1056/NEJMp2023312</a:t>
             </a:r>
           </a:p>
           <a:p>
@@ -29733,28 +29733,16 @@
               </a:lnSpc>
             </a:pPr>
             <a:r>
-              <a:rPr lang="en-US" sz="1400" dirty="0" err="1"/>
-              <a:t>Wosik</a:t>
-            </a:r>
-            <a:r>
               <a:rPr lang="en-US" sz="1400" dirty="0"/>
-              <a:t> J, et al. Telehealth transformation: COVID-19 and the rise of virtual care. </a:t>
+              <a:t>M. Ali and C. Mangione. Health Affairs, </a:t>
             </a:r>
             <a:r>
               <a:rPr lang="en-US" sz="1400" i="1" dirty="0"/>
-              <a:t>J Am Med Inform Assoc</a:t>
+              <a:t>In Press, </a:t>
             </a:r>
             <a:r>
               <a:rPr lang="en-US" sz="1400" dirty="0"/>
-              <a:t>. 2020;27(6):957-962. doi:10.1093/</a:t>
-            </a:r>
-            <a:r>
-              <a:rPr lang="en-US" sz="1400" dirty="0" err="1"/>
-              <a:t>jamia</a:t>
-            </a:r>
-            <a:r>
-              <a:rPr lang="en-US" sz="1400" dirty="0"/>
-              <a:t>/ocaa067</a:t>
+              <a:t>2020</a:t>
             </a:r>
           </a:p>
           <a:p>
@@ -29765,7 +29753,31 @@
             </a:pPr>
             <a:r>
               <a:rPr lang="en-US" sz="1400" dirty="0"/>
-              <a:t>Office of Health Informatics and Analytics, UCLA Health Information Technology</a:t>
+              <a:t>Garg S, et al. Hospitalization Rates and Characteristics of Patients Hospitalized with Laboratory-Confirmed Coronavirus Disease 2019 - COVID-NET, 14 States, March 1-30, 2020. </a:t>
+            </a:r>
+            <a:r>
+              <a:rPr lang="en-US" sz="1400" i="1" dirty="0"/>
+              <a:t>MMWR </a:t>
+            </a:r>
+            <a:r>
+              <a:rPr lang="en-US" sz="1400" i="1" dirty="0" err="1"/>
+              <a:t>Morb</a:t>
+            </a:r>
+            <a:r>
+              <a:rPr lang="en-US" sz="1400" i="1" dirty="0"/>
+              <a:t> Mortal </a:t>
+            </a:r>
+            <a:r>
+              <a:rPr lang="en-US" sz="1400" i="1" dirty="0" err="1"/>
+              <a:t>Wkly</a:t>
+            </a:r>
+            <a:r>
+              <a:rPr lang="en-US" sz="1400" i="1" dirty="0"/>
+              <a:t> Rep</a:t>
+            </a:r>
+            <a:r>
+              <a:rPr lang="en-US" sz="1400" dirty="0"/>
+              <a:t>. 2020;69(15):458-464. Published 2020 Apr 17. doi:10.15585/mmwr.mm6915e3</a:t>
             </a:r>
           </a:p>
           <a:p>
@@ -29776,15 +29788,7 @@
             </a:pPr>
             <a:r>
               <a:rPr lang="en-US" sz="1400" dirty="0"/>
-              <a:t>Richardson S, et al. Presenting Characteristics, Comorbidities, and Outcomes Among 5700 Patients Hospitalized With COVID-19 in the New York City Area. </a:t>
-            </a:r>
-            <a:r>
-              <a:rPr lang="en-US" sz="1400" i="1" dirty="0"/>
-              <a:t>JAMA.</a:t>
-            </a:r>
-            <a:r>
-              <a:rPr lang="en-US" sz="1400" dirty="0"/>
-              <a:t> 2020;323(20):2052–2059. doi:10.1001/jama.2020.6775</a:t>
+              <a:t>Office of Health Informatics and Analytics, UCLA Health Information Technology</a:t>
             </a:r>
           </a:p>
           <a:p>
@@ -29794,12 +29798,8 @@
               </a:lnSpc>
             </a:pPr>
             <a:r>
-              <a:rPr lang="en-US" sz="1400" dirty="0" err="1"/>
-              <a:t>Vahidy</a:t>
-            </a:r>
-            <a:r>
               <a:rPr lang="en-US" sz="1400" dirty="0"/>
-              <a:t> FS, et al. BMJ Open 2020;10:e039849. doi:10.1136/ bmjopen-2020-039849</a:t>
+              <a:t>Patrick SW, Henkhaus LE, Zickafoose JS, et al. Wellbeing of Parents and Children During the COVID-19 Pandemic: A National Survey. Pediatrics. 2020;146(4):e2020016824</a:t>
             </a:r>
           </a:p>
           <a:p>
@@ -29809,32 +29809,10 @@
               </a:lnSpc>
             </a:pPr>
             <a:r>
-              <a:rPr lang="en-US" sz="1400" dirty="0"/>
-              <a:t>Garg S, et al. Hospitalization Rates and Characteristics of Patients Hospitalized with Laboratory-Confirmed Coronavirus Disease 2019 - COVID-NET, 14 States, March 1-30, 2020. </a:t>
-            </a:r>
-            <a:r>
-              <a:rPr lang="en-US" sz="1400" i="1" dirty="0"/>
-              <a:t>MMWR </a:t>
-            </a:r>
-            <a:r>
-              <a:rPr lang="en-US" sz="1400" i="1" dirty="0" err="1"/>
-              <a:t>Morb</a:t>
-            </a:r>
-            <a:r>
-              <a:rPr lang="en-US" sz="1400" i="1" dirty="0"/>
-              <a:t> Mortal </a:t>
-            </a:r>
-            <a:r>
-              <a:rPr lang="en-US" sz="1400" i="1" dirty="0" err="1"/>
-              <a:t>Wkly</a:t>
-            </a:r>
-            <a:r>
-              <a:rPr lang="en-US" sz="1400" i="1" dirty="0"/>
-              <a:t> Rep</a:t>
-            </a:r>
-            <a:r>
-              <a:rPr lang="en-US" sz="1400" dirty="0"/>
-              <a:t>. 2020;69(15):458-464. Published 2020 Apr 17. doi:10.15585/mmwr.mm6915e3</a:t>
+              <a:rPr lang="en-GB" sz="1400" dirty="0">
+                <a:latin typeface="Arial" charset="0"/>
+              </a:rPr>
+              <a:t>Price-Haywood EG et al. N Engl J Med 2020;382:2534-2543</a:t>
             </a:r>
           </a:p>
           <a:p>
@@ -29845,21 +29823,15 @@
             </a:pPr>
             <a:r>
               <a:rPr lang="en-US" sz="1400" dirty="0"/>
-              <a:t>Agarwal SD, Sommers BD. Insurance Coverage after Job Loss - The Importance of the ACA during the Covid-Associated Recession [published online ahead of print, 2020 Aug 19]. </a:t>
+              <a:t>Richardson S, et al. Presenting Characteristics, Comorbidities, and Outcomes Among 5700 Patients Hospitalized With COVID-19 in the New York City Area. </a:t>
             </a:r>
             <a:r>
               <a:rPr lang="en-US" sz="1400" i="1" dirty="0"/>
-              <a:t>N Engl J Med</a:t>
+              <a:t>JAMA.</a:t>
             </a:r>
             <a:r>
               <a:rPr lang="en-US" sz="1400" dirty="0"/>
-              <a:t>. 2020;10.1056/NEJMp2023312. doi:10.1056/NEJMp2023312</a:t>
-            </a:r>
-            <a:r>
-              <a:rPr lang="en-GB" sz="1400" dirty="0">
-                <a:latin typeface="Arial" charset="0"/>
-              </a:rPr>
-              <a:t>Price-Haywood EG et al. N Engl J Med 2020;382:2534-2543</a:t>
+              <a:t> 2020;323(20):2052–2059. doi:10.1001/jama.2020.6775</a:t>
             </a:r>
           </a:p>
           <a:p>
@@ -29869,8 +29841,43 @@
               </a:lnSpc>
             </a:pPr>
             <a:r>
+              <a:rPr lang="en-US" sz="1400" dirty="0" err="1"/>
+              <a:t>Vahidy</a:t>
+            </a:r>
+            <a:r>
               <a:rPr lang="en-US" sz="1400" dirty="0"/>
-              <a:t>Patrick SW, Henkhaus LE, Zickafoose JS, et al. Wellbeing of Parents and Children During the COVID-19 Pandemic: A National Survey. Pediatrics. 2020;146(4):e2020016824</a:t>
+              <a:t> FS, et al. BMJ Open 2020;10:e039849. doi:10.1136/ bmjopen-2020-039849</a:t>
+            </a:r>
+          </a:p>
+          <a:p>
+            <a:pPr>
+              <a:lnSpc>
+                <a:spcPct val="100000"/>
+              </a:lnSpc>
+            </a:pPr>
+            <a:r>
+              <a:rPr lang="en-US" sz="1400" dirty="0" err="1"/>
+              <a:t>Wosik</a:t>
+            </a:r>
+            <a:r>
+              <a:rPr lang="en-US" sz="1400" dirty="0"/>
+              <a:t> J, et al. Telehealth transformation: COVID-19 and the rise of virtual care. </a:t>
+            </a:r>
+            <a:r>
+              <a:rPr lang="en-US" sz="1400" i="1" dirty="0"/>
+              <a:t>J Am Med Inform Assoc</a:t>
+            </a:r>
+            <a:r>
+              <a:rPr lang="en-US" sz="1400" dirty="0"/>
+              <a:t>. 2020;27(6):957-962. doi:10.1093/</a:t>
+            </a:r>
+            <a:r>
+              <a:rPr lang="en-US" sz="1400" dirty="0" err="1"/>
+              <a:t>jamia</a:t>
+            </a:r>
+            <a:r>
+              <a:rPr lang="en-US" sz="1400" dirty="0"/>
+              <a:t>/ocaa067</a:t>
             </a:r>
           </a:p>
           <a:p>
